--- a/Progress_Group21.pptx
+++ b/Progress_Group21.pptx
@@ -10242,8 +10242,8 @@
         </p:nvSpPr>
         <p:spPr bwMode="auto">
           <a:xfrm rot="10800000" flipV="1">
-            <a:off x="981307" y="1899732"/>
-            <a:ext cx="9471102" cy="3293209"/>
+            <a:off x="970156" y="1584543"/>
+            <a:ext cx="9471102" cy="4770537"/>
           </a:xfrm>
           <a:prstGeom prst="rect">
             <a:avLst/>
@@ -10308,34 +10308,106 @@
               <a:tabLst/>
             </a:pPr>
             <a:r>
-              <a:rPr lang="de-DE" altLang="de-DE" sz="1600" dirty="0">
-                <a:solidFill>
-                  <a:srgbClr val="1F2A44"/>
-                </a:solidFill>
-                <a:latin typeface="Georgia"/>
-              </a:rPr>
-              <a:t>Feature Engineering: </a:t>
-            </a:r>
-            <a:r>
-              <a:rPr lang="de-DE" altLang="de-DE" sz="1600" dirty="0" err="1">
-                <a:solidFill>
-                  <a:srgbClr val="1F2A44"/>
-                </a:solidFill>
-                <a:latin typeface="Georgia"/>
-              </a:rPr>
-              <a:t>Instead</a:t>
-            </a:r>
-            <a:r>
-              <a:rPr lang="de-DE" altLang="de-DE" sz="1600" dirty="0">
-                <a:solidFill>
-                  <a:srgbClr val="1F2A44"/>
-                </a:solidFill>
-                <a:latin typeface="Georgia"/>
-              </a:rPr>
-              <a:t> </a:t>
-            </a:r>
-            <a:r>
-              <a:rPr lang="de-DE" altLang="de-DE" sz="1600" dirty="0" err="1">
+              <a:rPr lang="de-DE" sz="1600" dirty="0">
+                <a:solidFill>
+                  <a:srgbClr val="1F2A44"/>
+                </a:solidFill>
+                <a:latin typeface="Georgia"/>
+              </a:rPr>
+              <a:t>Feature Engineering Breakthrough (27.8% </a:t>
+            </a:r>
+            <a:r>
+              <a:rPr lang="de-DE" sz="1600" dirty="0" err="1">
+                <a:solidFill>
+                  <a:srgbClr val="1F2A44"/>
+                </a:solidFill>
+                <a:latin typeface="Georgia"/>
+              </a:rPr>
+              <a:t>improvement</a:t>
+            </a:r>
+            <a:r>
+              <a:rPr lang="de-DE" sz="1600" dirty="0">
+                <a:solidFill>
+                  <a:srgbClr val="1F2A44"/>
+                </a:solidFill>
+                <a:latin typeface="Georgia"/>
+              </a:rPr>
+              <a:t>): - </a:t>
+            </a:r>
+            <a:r>
+              <a:rPr lang="de-DE" sz="1600" dirty="0" err="1">
+                <a:solidFill>
+                  <a:srgbClr val="1F2A44"/>
+                </a:solidFill>
+                <a:latin typeface="Georgia"/>
+              </a:rPr>
+              <a:t>Lagged</a:t>
+            </a:r>
+            <a:r>
+              <a:rPr lang="de-DE" sz="1600" dirty="0">
+                <a:solidFill>
+                  <a:srgbClr val="1F2A44"/>
+                </a:solidFill>
+                <a:latin typeface="Georgia"/>
+              </a:rPr>
+              <a:t> </a:t>
+            </a:r>
+            <a:r>
+              <a:rPr lang="de-DE" sz="1600" dirty="0" err="1">
+                <a:solidFill>
+                  <a:srgbClr val="1F2A44"/>
+                </a:solidFill>
+                <a:latin typeface="Georgia"/>
+              </a:rPr>
+              <a:t>features</a:t>
+            </a:r>
+            <a:r>
+              <a:rPr lang="de-DE" sz="1600" dirty="0">
+                <a:solidFill>
+                  <a:srgbClr val="1F2A44"/>
+                </a:solidFill>
+                <a:latin typeface="Georgia"/>
+              </a:rPr>
+              <a:t> (4-day </a:t>
+            </a:r>
+            <a:r>
+              <a:rPr lang="de-DE" sz="1600" dirty="0" err="1">
+                <a:solidFill>
+                  <a:srgbClr val="1F2A44"/>
+                </a:solidFill>
+                <a:latin typeface="Georgia"/>
+              </a:rPr>
+              <a:t>history</a:t>
+            </a:r>
+            <a:r>
+              <a:rPr lang="de-DE" sz="1600" dirty="0">
+                <a:solidFill>
+                  <a:srgbClr val="1F2A44"/>
+                </a:solidFill>
+                <a:latin typeface="Georgia"/>
+              </a:rPr>
+              <a:t>): +0.186 MAE </a:t>
+            </a:r>
+            <a:r>
+              <a:rPr lang="de-DE" sz="1600" dirty="0" err="1">
+                <a:solidFill>
+                  <a:srgbClr val="1F2A44"/>
+                </a:solidFill>
+                <a:latin typeface="Georgia"/>
+              </a:rPr>
+              <a:t>reduction</a:t>
+            </a:r>
+            <a:r>
+              <a:rPr lang="de-DE" sz="1600" dirty="0">
+                <a:solidFill>
+                  <a:srgbClr val="1F2A44"/>
+                </a:solidFill>
+                <a:latin typeface="Georgia"/>
+              </a:rPr>
+              <a:t> (52% </a:t>
+            </a:r>
+            <a:r>
+              <a:rPr lang="de-DE" sz="1600" dirty="0" err="1">
                 <a:solidFill>
                   <a:srgbClr val="1F2A44"/>
                 </a:solidFill>
@@ -10344,160 +10416,88 @@
               <a:t>of</a:t>
             </a:r>
             <a:r>
-              <a:rPr lang="de-DE" altLang="de-DE" sz="1600" dirty="0">
-                <a:solidFill>
-                  <a:srgbClr val="1F2A44"/>
-                </a:solidFill>
-                <a:latin typeface="Georgia"/>
-              </a:rPr>
-              <a:t> </a:t>
-            </a:r>
-            <a:r>
-              <a:rPr lang="de-DE" altLang="de-DE" sz="1600" dirty="0" err="1">
-                <a:solidFill>
-                  <a:srgbClr val="1F2A44"/>
-                </a:solidFill>
-                <a:latin typeface="Georgia"/>
-              </a:rPr>
-              <a:t>relying</a:t>
-            </a:r>
-            <a:r>
-              <a:rPr lang="de-DE" altLang="de-DE" sz="1600" dirty="0">
-                <a:solidFill>
-                  <a:srgbClr val="1F2A44"/>
-                </a:solidFill>
-                <a:latin typeface="Georgia"/>
-              </a:rPr>
-              <a:t> </a:t>
-            </a:r>
-            <a:r>
-              <a:rPr lang="de-DE" altLang="de-DE" sz="1600" dirty="0" err="1">
-                <a:solidFill>
-                  <a:srgbClr val="1F2A44"/>
-                </a:solidFill>
-                <a:latin typeface="Georgia"/>
-              </a:rPr>
-              <a:t>solely</a:t>
-            </a:r>
-            <a:r>
-              <a:rPr lang="de-DE" altLang="de-DE" sz="1600" dirty="0">
-                <a:solidFill>
-                  <a:srgbClr val="1F2A44"/>
-                </a:solidFill>
-                <a:latin typeface="Georgia"/>
-              </a:rPr>
-              <a:t> on </a:t>
-            </a:r>
-            <a:r>
-              <a:rPr lang="de-DE" altLang="de-DE" sz="1600" dirty="0" err="1">
-                <a:solidFill>
-                  <a:srgbClr val="1F2A44"/>
-                </a:solidFill>
-                <a:latin typeface="Georgia"/>
-              </a:rPr>
-              <a:t>raw</a:t>
-            </a:r>
-            <a:r>
-              <a:rPr lang="de-DE" altLang="de-DE" sz="1600" dirty="0">
-                <a:solidFill>
-                  <a:srgbClr val="1F2A44"/>
-                </a:solidFill>
-                <a:latin typeface="Georgia"/>
-              </a:rPr>
-              <a:t> </a:t>
-            </a:r>
-            <a:r>
-              <a:rPr lang="de-DE" altLang="de-DE" sz="1600" dirty="0" err="1">
-                <a:solidFill>
-                  <a:srgbClr val="1F2A44"/>
-                </a:solidFill>
-                <a:latin typeface="Georgia"/>
-              </a:rPr>
-              <a:t>meteorological</a:t>
-            </a:r>
-            <a:r>
-              <a:rPr lang="de-DE" altLang="de-DE" sz="1600" dirty="0">
-                <a:solidFill>
-                  <a:srgbClr val="1F2A44"/>
-                </a:solidFill>
-                <a:latin typeface="Georgia"/>
-              </a:rPr>
-              <a:t> </a:t>
-            </a:r>
-            <a:r>
-              <a:rPr lang="de-DE" altLang="de-DE" sz="1600" dirty="0" err="1">
-                <a:solidFill>
-                  <a:srgbClr val="1F2A44"/>
-                </a:solidFill>
-                <a:latin typeface="Georgia"/>
-              </a:rPr>
-              <a:t>data</a:t>
-            </a:r>
-            <a:r>
-              <a:rPr lang="de-DE" altLang="de-DE" sz="1600" dirty="0">
-                <a:solidFill>
-                  <a:srgbClr val="1F2A44"/>
-                </a:solidFill>
-                <a:latin typeface="Georgia"/>
-              </a:rPr>
-              <a:t>, </a:t>
-            </a:r>
-            <a:r>
-              <a:rPr lang="de-DE" altLang="de-DE" sz="1600" dirty="0" err="1">
-                <a:solidFill>
-                  <a:srgbClr val="1F2A44"/>
-                </a:solidFill>
-                <a:latin typeface="Georgia"/>
-              </a:rPr>
-              <a:t>we</a:t>
-            </a:r>
-            <a:r>
-              <a:rPr lang="de-DE" altLang="de-DE" sz="1600" dirty="0">
-                <a:solidFill>
-                  <a:srgbClr val="1F2A44"/>
-                </a:solidFill>
-                <a:latin typeface="Georgia"/>
-              </a:rPr>
-              <a:t> </a:t>
-            </a:r>
-            <a:r>
-              <a:rPr lang="de-DE" altLang="de-DE" sz="1600" dirty="0" err="1">
-                <a:solidFill>
-                  <a:srgbClr val="1F2A44"/>
-                </a:solidFill>
-                <a:latin typeface="Georgia"/>
-              </a:rPr>
-              <a:t>created</a:t>
-            </a:r>
-            <a:r>
-              <a:rPr lang="de-DE" altLang="de-DE" sz="1600" dirty="0">
-                <a:solidFill>
-                  <a:srgbClr val="1F2A44"/>
-                </a:solidFill>
-                <a:latin typeface="Georgia"/>
-              </a:rPr>
-              <a:t> </a:t>
-            </a:r>
-            <a:r>
-              <a:rPr lang="de-DE" altLang="de-DE" sz="1600" dirty="0" err="1">
-                <a:solidFill>
-                  <a:srgbClr val="1F2A44"/>
-                </a:solidFill>
-                <a:latin typeface="Georgia"/>
-              </a:rPr>
-              <a:t>contextual</a:t>
-            </a:r>
-            <a:r>
-              <a:rPr lang="de-DE" altLang="de-DE" sz="1600" dirty="0">
-                <a:solidFill>
-                  <a:srgbClr val="1F2A44"/>
-                </a:solidFill>
-                <a:latin typeface="Georgia"/>
-              </a:rPr>
-              <a:t> </a:t>
-            </a:r>
-            <a:r>
-              <a:rPr lang="de-DE" altLang="de-DE" sz="1600" dirty="0" err="1">
+              <a:rPr lang="de-DE" sz="1600" dirty="0">
+                <a:solidFill>
+                  <a:srgbClr val="1F2A44"/>
+                </a:solidFill>
+                <a:latin typeface="Georgia"/>
+              </a:rPr>
+              <a:t> total </a:t>
+            </a:r>
+            <a:r>
+              <a:rPr lang="de-DE" sz="1600" dirty="0" err="1">
+                <a:solidFill>
+                  <a:srgbClr val="1F2A44"/>
+                </a:solidFill>
+                <a:latin typeface="Georgia"/>
+              </a:rPr>
+              <a:t>improvement</a:t>
+            </a:r>
+            <a:r>
+              <a:rPr lang="de-DE" sz="1600" dirty="0">
+                <a:solidFill>
+                  <a:srgbClr val="1F2A44"/>
+                </a:solidFill>
+                <a:latin typeface="Georgia"/>
+              </a:rPr>
+              <a:t>) - Rolling </a:t>
+            </a:r>
+            <a:r>
+              <a:rPr lang="de-DE" sz="1600" dirty="0" err="1">
+                <a:solidFill>
+                  <a:srgbClr val="1F2A44"/>
+                </a:solidFill>
+                <a:latin typeface="Georgia"/>
+              </a:rPr>
+              <a:t>statistics</a:t>
+            </a:r>
+            <a:r>
+              <a:rPr lang="de-DE" sz="1600" dirty="0">
+                <a:solidFill>
+                  <a:srgbClr val="1F2A44"/>
+                </a:solidFill>
+                <a:latin typeface="Georgia"/>
+              </a:rPr>
+              <a:t> (7/14-day </a:t>
+            </a:r>
+            <a:r>
+              <a:rPr lang="de-DE" sz="1600" dirty="0" err="1">
+                <a:solidFill>
+                  <a:srgbClr val="1F2A44"/>
+                </a:solidFill>
+                <a:latin typeface="Georgia"/>
+              </a:rPr>
+              <a:t>windows</a:t>
+            </a:r>
+            <a:r>
+              <a:rPr lang="de-DE" sz="1600" dirty="0">
+                <a:solidFill>
+                  <a:srgbClr val="1F2A44"/>
+                </a:solidFill>
+                <a:latin typeface="Georgia"/>
+              </a:rPr>
+              <a:t>): +0.098 MAE </a:t>
+            </a:r>
+            <a:r>
+              <a:rPr lang="de-DE" sz="1600" dirty="0" err="1">
+                <a:solidFill>
+                  <a:srgbClr val="1F2A44"/>
+                </a:solidFill>
+                <a:latin typeface="Georgia"/>
+              </a:rPr>
+              <a:t>reduction</a:t>
+            </a:r>
+            <a:r>
+              <a:rPr lang="de-DE" sz="1600" dirty="0">
+                <a:solidFill>
+                  <a:srgbClr val="1F2A44"/>
+                </a:solidFill>
+                <a:latin typeface="Georgia"/>
+              </a:rPr>
+              <a:t> (28%) - Trend </a:t>
+            </a:r>
+            <a:r>
+              <a:rPr lang="de-DE" sz="1600" dirty="0" err="1">
                 <a:solidFill>
                   <a:srgbClr val="1F2A44"/>
                 </a:solidFill>
@@ -10506,7 +10506,7 @@
               <a:t>features</a:t>
             </a:r>
             <a:r>
-              <a:rPr lang="de-DE" altLang="de-DE" sz="1600" dirty="0">
+              <a:rPr lang="de-DE" sz="1600" dirty="0">
                 <a:solidFill>
                   <a:srgbClr val="1F2A44"/>
                 </a:solidFill>
@@ -10515,220 +10515,130 @@
               <a:t> (</a:t>
             </a:r>
             <a:r>
-              <a:rPr lang="de-DE" altLang="de-DE" sz="1600" dirty="0" err="1">
-                <a:solidFill>
-                  <a:srgbClr val="1F2A44"/>
-                </a:solidFill>
-                <a:latin typeface="Georgia"/>
-              </a:rPr>
-              <a:t>rolling</a:t>
-            </a:r>
-            <a:r>
-              <a:rPr lang="de-DE" altLang="de-DE" sz="1600" dirty="0">
-                <a:solidFill>
-                  <a:srgbClr val="1F2A44"/>
-                </a:solidFill>
-                <a:latin typeface="Georgia"/>
-              </a:rPr>
-              <a:t> </a:t>
-            </a:r>
-            <a:r>
-              <a:rPr lang="de-DE" altLang="de-DE" sz="1600" dirty="0" err="1">
-                <a:solidFill>
-                  <a:srgbClr val="1F2A44"/>
-                </a:solidFill>
-                <a:latin typeface="Georgia"/>
-              </a:rPr>
-              <a:t>statistics</a:t>
-            </a:r>
-            <a:r>
-              <a:rPr lang="de-DE" altLang="de-DE" sz="1600" dirty="0">
-                <a:solidFill>
-                  <a:srgbClr val="1F2A44"/>
-                </a:solidFill>
-                <a:latin typeface="Georgia"/>
-              </a:rPr>
-              <a:t>, </a:t>
-            </a:r>
-            <a:r>
-              <a:rPr lang="de-DE" altLang="de-DE" sz="1600" dirty="0" err="1">
-                <a:solidFill>
-                  <a:srgbClr val="1F2A44"/>
-                </a:solidFill>
-                <a:latin typeface="Georgia"/>
-              </a:rPr>
-              <a:t>lagged</a:t>
-            </a:r>
-            <a:r>
-              <a:rPr lang="de-DE" altLang="de-DE" sz="1600" dirty="0">
-                <a:solidFill>
-                  <a:srgbClr val="1F2A44"/>
-                </a:solidFill>
-                <a:latin typeface="Georgia"/>
-              </a:rPr>
-              <a:t> </a:t>
-            </a:r>
-            <a:r>
-              <a:rPr lang="de-DE" altLang="de-DE" sz="1600" dirty="0" err="1">
-                <a:solidFill>
-                  <a:srgbClr val="1F2A44"/>
-                </a:solidFill>
-                <a:latin typeface="Georgia"/>
-              </a:rPr>
-              <a:t>values</a:t>
-            </a:r>
-            <a:r>
-              <a:rPr lang="de-DE" altLang="de-DE" sz="1600" dirty="0">
-                <a:solidFill>
-                  <a:srgbClr val="1F2A44"/>
-                </a:solidFill>
-                <a:latin typeface="Georgia"/>
-              </a:rPr>
-              <a:t>, </a:t>
-            </a:r>
-            <a:r>
-              <a:rPr lang="de-DE" altLang="de-DE" sz="1600" dirty="0" err="1">
-                <a:solidFill>
-                  <a:srgbClr val="1F2A44"/>
-                </a:solidFill>
-                <a:latin typeface="Georgia"/>
-              </a:rPr>
-              <a:t>trends</a:t>
-            </a:r>
-            <a:r>
-              <a:rPr lang="de-DE" altLang="de-DE" sz="1600" dirty="0">
-                <a:solidFill>
-                  <a:srgbClr val="1F2A44"/>
-                </a:solidFill>
-                <a:latin typeface="Georgia"/>
-              </a:rPr>
-              <a:t>) </a:t>
-            </a:r>
-            <a:r>
-              <a:rPr lang="de-DE" altLang="de-DE" sz="1600" dirty="0" err="1">
-                <a:solidFill>
-                  <a:srgbClr val="1F2A44"/>
-                </a:solidFill>
-                <a:latin typeface="Georgia"/>
-              </a:rPr>
-              <a:t>that</a:t>
-            </a:r>
-            <a:r>
-              <a:rPr lang="de-DE" altLang="de-DE" sz="1600" dirty="0">
-                <a:solidFill>
-                  <a:srgbClr val="1F2A44"/>
-                </a:solidFill>
-                <a:latin typeface="Georgia"/>
-              </a:rPr>
-              <a:t> </a:t>
-            </a:r>
-            <a:r>
-              <a:rPr lang="de-DE" altLang="de-DE" sz="1600" dirty="0" err="1">
-                <a:solidFill>
-                  <a:srgbClr val="1F2A44"/>
-                </a:solidFill>
-                <a:latin typeface="Georgia"/>
-              </a:rPr>
-              <a:t>help</a:t>
-            </a:r>
-            <a:r>
-              <a:rPr lang="de-DE" altLang="de-DE" sz="1600" dirty="0">
-                <a:solidFill>
-                  <a:srgbClr val="1F2A44"/>
-                </a:solidFill>
-                <a:latin typeface="Georgia"/>
-              </a:rPr>
-              <a:t> </a:t>
-            </a:r>
-            <a:r>
-              <a:rPr lang="de-DE" altLang="de-DE" sz="1600" dirty="0" err="1">
-                <a:solidFill>
-                  <a:srgbClr val="1F2A44"/>
-                </a:solidFill>
-                <a:latin typeface="Georgia"/>
-              </a:rPr>
-              <a:t>the</a:t>
-            </a:r>
-            <a:r>
-              <a:rPr lang="de-DE" altLang="de-DE" sz="1600" dirty="0">
-                <a:solidFill>
-                  <a:srgbClr val="1F2A44"/>
-                </a:solidFill>
-                <a:latin typeface="Georgia"/>
-              </a:rPr>
-              <a:t> </a:t>
-            </a:r>
-            <a:r>
-              <a:rPr lang="de-DE" altLang="de-DE" sz="1600" dirty="0" err="1">
-                <a:solidFill>
-                  <a:srgbClr val="1F2A44"/>
-                </a:solidFill>
-                <a:latin typeface="Georgia"/>
-              </a:rPr>
-              <a:t>model</a:t>
-            </a:r>
-            <a:r>
-              <a:rPr lang="de-DE" altLang="de-DE" sz="1600" dirty="0">
-                <a:solidFill>
-                  <a:srgbClr val="1F2A44"/>
-                </a:solidFill>
-                <a:latin typeface="Georgia"/>
-              </a:rPr>
-              <a:t> </a:t>
-            </a:r>
-            <a:r>
-              <a:rPr lang="de-DE" altLang="de-DE" sz="1600" dirty="0" err="1">
-                <a:solidFill>
-                  <a:srgbClr val="1F2A44"/>
-                </a:solidFill>
-                <a:latin typeface="Georgia"/>
-              </a:rPr>
-              <a:t>understand</a:t>
-            </a:r>
-            <a:r>
-              <a:rPr lang="de-DE" altLang="de-DE" sz="1600" dirty="0">
-                <a:solidFill>
-                  <a:srgbClr val="1F2A44"/>
-                </a:solidFill>
-                <a:latin typeface="Georgia"/>
-              </a:rPr>
-              <a:t> temporal </a:t>
-            </a:r>
-            <a:r>
-              <a:rPr lang="de-DE" altLang="de-DE" sz="1600" dirty="0" err="1">
-                <a:solidFill>
-                  <a:srgbClr val="1F2A44"/>
-                </a:solidFill>
-                <a:latin typeface="Georgia"/>
-              </a:rPr>
-              <a:t>patterns</a:t>
-            </a:r>
-            <a:r>
-              <a:rPr lang="de-DE" altLang="de-DE" sz="1600" dirty="0">
-                <a:solidFill>
-                  <a:srgbClr val="1F2A44"/>
-                </a:solidFill>
-                <a:latin typeface="Georgia"/>
-              </a:rPr>
-              <a:t> and </a:t>
-            </a:r>
-            <a:r>
-              <a:rPr lang="de-DE" altLang="de-DE" sz="1600" dirty="0" err="1">
-                <a:solidFill>
-                  <a:srgbClr val="1F2A44"/>
-                </a:solidFill>
-                <a:latin typeface="Georgia"/>
-              </a:rPr>
-              <a:t>relationships</a:t>
-            </a:r>
-            <a:r>
-              <a:rPr lang="de-DE" altLang="de-DE" sz="1600" dirty="0">
-                <a:solidFill>
-                  <a:srgbClr val="1F2A44"/>
-                </a:solidFill>
-                <a:latin typeface="Georgia"/>
-              </a:rPr>
-              <a:t>. </a:t>
+              <a:rPr lang="de-DE" sz="1600" dirty="0" err="1">
+                <a:solidFill>
+                  <a:srgbClr val="1F2A44"/>
+                </a:solidFill>
+                <a:latin typeface="Georgia"/>
+              </a:rPr>
+              <a:t>directional</a:t>
+            </a:r>
+            <a:r>
+              <a:rPr lang="de-DE" sz="1600" dirty="0">
+                <a:solidFill>
+                  <a:srgbClr val="1F2A44"/>
+                </a:solidFill>
+                <a:latin typeface="Georgia"/>
+              </a:rPr>
+              <a:t> </a:t>
+            </a:r>
+            <a:r>
+              <a:rPr lang="de-DE" sz="1600" dirty="0" err="1">
+                <a:solidFill>
+                  <a:srgbClr val="1F2A44"/>
+                </a:solidFill>
+                <a:latin typeface="Georgia"/>
+              </a:rPr>
+              <a:t>changes</a:t>
+            </a:r>
+            <a:r>
+              <a:rPr lang="de-DE" sz="1600" dirty="0">
+                <a:solidFill>
+                  <a:srgbClr val="1F2A44"/>
+                </a:solidFill>
+                <a:latin typeface="Georgia"/>
+              </a:rPr>
+              <a:t>): +0.068 MAE </a:t>
+            </a:r>
+            <a:r>
+              <a:rPr lang="de-DE" sz="1600" dirty="0" err="1">
+                <a:solidFill>
+                  <a:srgbClr val="1F2A44"/>
+                </a:solidFill>
+                <a:latin typeface="Georgia"/>
+              </a:rPr>
+              <a:t>reduction</a:t>
+            </a:r>
+            <a:r>
+              <a:rPr lang="de-DE" sz="1600" dirty="0">
+                <a:solidFill>
+                  <a:srgbClr val="1F2A44"/>
+                </a:solidFill>
+                <a:latin typeface="Georgia"/>
+              </a:rPr>
+              <a:t> (19%) - Interaction </a:t>
+            </a:r>
+            <a:r>
+              <a:rPr lang="de-DE" sz="1600" dirty="0" err="1">
+                <a:solidFill>
+                  <a:srgbClr val="1F2A44"/>
+                </a:solidFill>
+                <a:latin typeface="Georgia"/>
+              </a:rPr>
+              <a:t>features</a:t>
+            </a:r>
+            <a:r>
+              <a:rPr lang="de-DE" sz="1600" dirty="0">
+                <a:solidFill>
+                  <a:srgbClr val="1F2A44"/>
+                </a:solidFill>
+                <a:latin typeface="Georgia"/>
+              </a:rPr>
+              <a:t> (</a:t>
+            </a:r>
+            <a:r>
+              <a:rPr lang="de-DE" sz="1600" dirty="0" err="1">
+                <a:solidFill>
+                  <a:srgbClr val="1F2A44"/>
+                </a:solidFill>
+                <a:latin typeface="Georgia"/>
+              </a:rPr>
+              <a:t>Temperature</a:t>
+            </a:r>
+            <a:r>
+              <a:rPr lang="de-DE" sz="1600" dirty="0">
+                <a:solidFill>
+                  <a:srgbClr val="1F2A44"/>
+                </a:solidFill>
+                <a:latin typeface="Georgia"/>
+              </a:rPr>
+              <a:t> × </a:t>
+            </a:r>
+            <a:r>
+              <a:rPr lang="de-DE" sz="1600" dirty="0" err="1">
+                <a:solidFill>
+                  <a:srgbClr val="1F2A44"/>
+                </a:solidFill>
+                <a:latin typeface="Georgia"/>
+              </a:rPr>
+              <a:t>Humidity</a:t>
+            </a:r>
+            <a:r>
+              <a:rPr lang="de-DE" sz="1600" dirty="0">
+                <a:solidFill>
+                  <a:srgbClr val="1F2A44"/>
+                </a:solidFill>
+                <a:latin typeface="Georgia"/>
+              </a:rPr>
+              <a:t>, etc.): +0.051 MAE </a:t>
+            </a:r>
+            <a:r>
+              <a:rPr lang="de-DE" sz="1600" dirty="0" err="1">
+                <a:solidFill>
+                  <a:srgbClr val="1F2A44"/>
+                </a:solidFill>
+                <a:latin typeface="Georgia"/>
+              </a:rPr>
+              <a:t>reduction</a:t>
+            </a:r>
+            <a:r>
+              <a:rPr lang="de-DE" sz="1600" dirty="0">
+                <a:solidFill>
+                  <a:srgbClr val="1F2A44"/>
+                </a:solidFill>
+                <a:latin typeface="Georgia"/>
+              </a:rPr>
+              <a:t> (14%)</a:t>
             </a:r>
           </a:p>
           <a:p>
@@ -12062,6 +11972,414 @@
               </a:rPr>
               <a:t>.</a:t>
             </a:r>
+          </a:p>
+          <a:p>
+            <a:pPr marR="0" lvl="0" indent="-342900" fontAlgn="base">
+              <a:lnSpc>
+                <a:spcPct val="100000"/>
+              </a:lnSpc>
+              <a:spcBef>
+                <a:spcPct val="0"/>
+              </a:spcBef>
+              <a:spcAft>
+                <a:spcPct val="0"/>
+              </a:spcAft>
+              <a:buClrTx/>
+              <a:buSzTx/>
+              <a:buFont typeface="+mj-lt"/>
+              <a:buAutoNum type="arabicPeriod"/>
+              <a:tabLst/>
+            </a:pPr>
+            <a:endParaRPr lang="de-DE" altLang="de-DE" sz="1600" dirty="0">
+              <a:solidFill>
+                <a:srgbClr val="1F2A44"/>
+              </a:solidFill>
+              <a:latin typeface="Georgia"/>
+            </a:endParaRPr>
+          </a:p>
+          <a:p>
+            <a:pPr marR="0" lvl="0" indent="-342900" fontAlgn="base">
+              <a:lnSpc>
+                <a:spcPct val="100000"/>
+              </a:lnSpc>
+              <a:spcBef>
+                <a:spcPct val="0"/>
+              </a:spcBef>
+              <a:spcAft>
+                <a:spcPct val="0"/>
+              </a:spcAft>
+              <a:buClrTx/>
+              <a:buSzTx/>
+              <a:buFont typeface="+mj-lt"/>
+              <a:buAutoNum type="arabicPeriod"/>
+              <a:tabLst/>
+            </a:pPr>
+            <a:r>
+              <a:rPr lang="de-DE" sz="1600" dirty="0">
+                <a:solidFill>
+                  <a:srgbClr val="1F2A44"/>
+                </a:solidFill>
+                <a:latin typeface="Georgia"/>
+              </a:rPr>
+              <a:t>Baseline (</a:t>
+            </a:r>
+            <a:r>
+              <a:rPr lang="de-DE" sz="1600" dirty="0" err="1">
+                <a:solidFill>
+                  <a:srgbClr val="1F2A44"/>
+                </a:solidFill>
+                <a:latin typeface="Georgia"/>
+              </a:rPr>
+              <a:t>raw</a:t>
+            </a:r>
+            <a:r>
+              <a:rPr lang="de-DE" sz="1600" dirty="0">
+                <a:solidFill>
+                  <a:srgbClr val="1F2A44"/>
+                </a:solidFill>
+                <a:latin typeface="Georgia"/>
+              </a:rPr>
+              <a:t> </a:t>
+            </a:r>
+            <a:r>
+              <a:rPr lang="de-DE" sz="1600" dirty="0" err="1">
+                <a:solidFill>
+                  <a:srgbClr val="1F2A44"/>
+                </a:solidFill>
+                <a:latin typeface="Georgia"/>
+              </a:rPr>
+              <a:t>features</a:t>
+            </a:r>
+            <a:r>
+              <a:rPr lang="de-DE" sz="1600" dirty="0">
+                <a:solidFill>
+                  <a:srgbClr val="1F2A44"/>
+                </a:solidFill>
+                <a:latin typeface="Georgia"/>
+              </a:rPr>
+              <a:t> </a:t>
+            </a:r>
+            <a:r>
+              <a:rPr lang="de-DE" sz="1600" dirty="0" err="1">
+                <a:solidFill>
+                  <a:srgbClr val="1F2A44"/>
+                </a:solidFill>
+                <a:latin typeface="Georgia"/>
+              </a:rPr>
+              <a:t>only</a:t>
+            </a:r>
+            <a:r>
+              <a:rPr lang="de-DE" sz="1600" dirty="0">
+                <a:solidFill>
+                  <a:srgbClr val="1F2A44"/>
+                </a:solidFill>
+                <a:latin typeface="Georgia"/>
+              </a:rPr>
+              <a:t>): MAE = 1.2145 After </a:t>
+            </a:r>
+            <a:r>
+              <a:rPr lang="de-DE" sz="1600" dirty="0" err="1">
+                <a:solidFill>
+                  <a:srgbClr val="1F2A44"/>
+                </a:solidFill>
+                <a:latin typeface="Georgia"/>
+              </a:rPr>
+              <a:t>full</a:t>
+            </a:r>
+            <a:r>
+              <a:rPr lang="de-DE" sz="1600" dirty="0">
+                <a:solidFill>
+                  <a:srgbClr val="1F2A44"/>
+                </a:solidFill>
+                <a:latin typeface="Georgia"/>
+              </a:rPr>
+              <a:t> feature </a:t>
+            </a:r>
+            <a:r>
+              <a:rPr lang="de-DE" sz="1600" dirty="0" err="1">
+                <a:solidFill>
+                  <a:srgbClr val="1F2A44"/>
+                </a:solidFill>
+                <a:latin typeface="Georgia"/>
+              </a:rPr>
+              <a:t>engineering</a:t>
+            </a:r>
+            <a:r>
+              <a:rPr lang="de-DE" sz="1600" dirty="0">
+                <a:solidFill>
+                  <a:srgbClr val="1F2A44"/>
+                </a:solidFill>
+                <a:latin typeface="Georgia"/>
+              </a:rPr>
+              <a:t>: MAE = 0.8765 </a:t>
+            </a:r>
+            <a:r>
+              <a:rPr lang="de-DE" sz="1600" dirty="0" err="1">
+                <a:solidFill>
+                  <a:srgbClr val="1F2A44"/>
+                </a:solidFill>
+                <a:latin typeface="Georgia"/>
+              </a:rPr>
+              <a:t>Improvement</a:t>
+            </a:r>
+            <a:r>
+              <a:rPr lang="de-DE" sz="1600" dirty="0">
+                <a:solidFill>
+                  <a:srgbClr val="1F2A44"/>
+                </a:solidFill>
+                <a:latin typeface="Georgia"/>
+              </a:rPr>
+              <a:t>: -27.8% Region-</a:t>
+            </a:r>
+            <a:r>
+              <a:rPr lang="de-DE" sz="1600" dirty="0" err="1">
+                <a:solidFill>
+                  <a:srgbClr val="1F2A44"/>
+                </a:solidFill>
+                <a:latin typeface="Georgia"/>
+              </a:rPr>
+              <a:t>Specific</a:t>
+            </a:r>
+            <a:r>
+              <a:rPr lang="de-DE" sz="1600" dirty="0">
+                <a:solidFill>
+                  <a:srgbClr val="1F2A44"/>
+                </a:solidFill>
+                <a:latin typeface="Georgia"/>
+              </a:rPr>
+              <a:t> Modeling: - </a:t>
+            </a:r>
+            <a:r>
+              <a:rPr lang="de-DE" sz="1600" dirty="0" err="1">
+                <a:solidFill>
+                  <a:srgbClr val="1F2A44"/>
+                </a:solidFill>
+                <a:latin typeface="Georgia"/>
+              </a:rPr>
+              <a:t>Trained</a:t>
+            </a:r>
+            <a:r>
+              <a:rPr lang="de-DE" sz="1600" dirty="0">
+                <a:solidFill>
+                  <a:srgbClr val="1F2A44"/>
+                </a:solidFill>
+                <a:latin typeface="Georgia"/>
+              </a:rPr>
+              <a:t> separate </a:t>
+            </a:r>
+            <a:r>
+              <a:rPr lang="de-DE" sz="1600" dirty="0" err="1">
+                <a:solidFill>
+                  <a:srgbClr val="1F2A44"/>
+                </a:solidFill>
+                <a:latin typeface="Georgia"/>
+              </a:rPr>
+              <a:t>LightGBM</a:t>
+            </a:r>
+            <a:r>
+              <a:rPr lang="de-DE" sz="1600" dirty="0">
+                <a:solidFill>
+                  <a:srgbClr val="1F2A44"/>
+                </a:solidFill>
+                <a:latin typeface="Georgia"/>
+              </a:rPr>
+              <a:t> per </a:t>
+            </a:r>
+            <a:r>
+              <a:rPr lang="de-DE" sz="1600" dirty="0" err="1">
+                <a:solidFill>
+                  <a:srgbClr val="1F2A44"/>
+                </a:solidFill>
+                <a:latin typeface="Georgia"/>
+              </a:rPr>
+              <a:t>region</a:t>
+            </a:r>
+            <a:r>
+              <a:rPr lang="de-DE" sz="1600" dirty="0">
+                <a:solidFill>
+                  <a:srgbClr val="1F2A44"/>
+                </a:solidFill>
+                <a:latin typeface="Georgia"/>
+              </a:rPr>
+              <a:t> (2,248 </a:t>
+            </a:r>
+            <a:r>
+              <a:rPr lang="de-DE" sz="1600" dirty="0" err="1">
+                <a:solidFill>
+                  <a:srgbClr val="1F2A44"/>
+                </a:solidFill>
+                <a:latin typeface="Georgia"/>
+              </a:rPr>
+              <a:t>models</a:t>
+            </a:r>
+            <a:r>
+              <a:rPr lang="de-DE" sz="1600" dirty="0">
+                <a:solidFill>
+                  <a:srgbClr val="1F2A44"/>
+                </a:solidFill>
+                <a:latin typeface="Georgia"/>
+              </a:rPr>
+              <a:t>) - </a:t>
+            </a:r>
+            <a:r>
+              <a:rPr lang="de-DE" sz="1600" dirty="0" err="1">
+                <a:solidFill>
+                  <a:srgbClr val="1F2A44"/>
+                </a:solidFill>
+                <a:latin typeface="Georgia"/>
+              </a:rPr>
+              <a:t>Captures</a:t>
+            </a:r>
+            <a:r>
+              <a:rPr lang="de-DE" sz="1600" dirty="0">
+                <a:solidFill>
+                  <a:srgbClr val="1F2A44"/>
+                </a:solidFill>
+                <a:latin typeface="Georgia"/>
+              </a:rPr>
+              <a:t> </a:t>
+            </a:r>
+            <a:r>
+              <a:rPr lang="de-DE" sz="1600" dirty="0" err="1">
+                <a:solidFill>
+                  <a:srgbClr val="1F2A44"/>
+                </a:solidFill>
+                <a:latin typeface="Georgia"/>
+              </a:rPr>
+              <a:t>local</a:t>
+            </a:r>
+            <a:r>
+              <a:rPr lang="de-DE" sz="1600" dirty="0">
+                <a:solidFill>
+                  <a:srgbClr val="1F2A44"/>
+                </a:solidFill>
+                <a:latin typeface="Georgia"/>
+              </a:rPr>
+              <a:t> </a:t>
+            </a:r>
+            <a:r>
+              <a:rPr lang="de-DE" sz="1600" dirty="0" err="1">
+                <a:solidFill>
+                  <a:srgbClr val="1F2A44"/>
+                </a:solidFill>
+                <a:latin typeface="Georgia"/>
+              </a:rPr>
+              <a:t>meteorological</a:t>
+            </a:r>
+            <a:r>
+              <a:rPr lang="de-DE" sz="1600" dirty="0">
+                <a:solidFill>
+                  <a:srgbClr val="1F2A44"/>
+                </a:solidFill>
+                <a:latin typeface="Georgia"/>
+              </a:rPr>
+              <a:t> </a:t>
+            </a:r>
+            <a:r>
+              <a:rPr lang="de-DE" sz="1600" dirty="0" err="1">
+                <a:solidFill>
+                  <a:srgbClr val="1F2A44"/>
+                </a:solidFill>
+                <a:latin typeface="Georgia"/>
+              </a:rPr>
+              <a:t>patterns</a:t>
+            </a:r>
+            <a:r>
+              <a:rPr lang="de-DE" sz="1600" dirty="0">
+                <a:solidFill>
+                  <a:srgbClr val="1F2A44"/>
+                </a:solidFill>
+                <a:latin typeface="Georgia"/>
+              </a:rPr>
+              <a:t> and </a:t>
+            </a:r>
+            <a:r>
+              <a:rPr lang="de-DE" sz="1600" dirty="0" err="1">
+                <a:solidFill>
+                  <a:srgbClr val="1F2A44"/>
+                </a:solidFill>
+                <a:latin typeface="Georgia"/>
+              </a:rPr>
+              <a:t>drought</a:t>
+            </a:r>
+            <a:r>
+              <a:rPr lang="de-DE" sz="1600" dirty="0">
+                <a:solidFill>
+                  <a:srgbClr val="1F2A44"/>
+                </a:solidFill>
+                <a:latin typeface="Georgia"/>
+              </a:rPr>
+              <a:t> </a:t>
+            </a:r>
+            <a:r>
+              <a:rPr lang="de-DE" sz="1600" dirty="0" err="1">
+                <a:solidFill>
+                  <a:srgbClr val="1F2A44"/>
+                </a:solidFill>
+                <a:latin typeface="Georgia"/>
+              </a:rPr>
+              <a:t>dynamics</a:t>
+            </a:r>
+            <a:r>
+              <a:rPr lang="de-DE" sz="1600" dirty="0">
+                <a:solidFill>
+                  <a:srgbClr val="1F2A44"/>
+                </a:solidFill>
+                <a:latin typeface="Georgia"/>
+              </a:rPr>
+              <a:t> - </a:t>
+            </a:r>
+            <a:r>
+              <a:rPr lang="de-DE" sz="1600" dirty="0" err="1">
+                <a:solidFill>
+                  <a:srgbClr val="1F2A44"/>
+                </a:solidFill>
+                <a:latin typeface="Georgia"/>
+              </a:rPr>
+              <a:t>Outperforms</a:t>
+            </a:r>
+            <a:r>
+              <a:rPr lang="de-DE" sz="1600" dirty="0">
+                <a:solidFill>
+                  <a:srgbClr val="1F2A44"/>
+                </a:solidFill>
+                <a:latin typeface="Georgia"/>
+              </a:rPr>
+              <a:t> global </a:t>
+            </a:r>
+            <a:r>
+              <a:rPr lang="de-DE" sz="1600" dirty="0" err="1">
+                <a:solidFill>
+                  <a:srgbClr val="1F2A44"/>
+                </a:solidFill>
+                <a:latin typeface="Georgia"/>
+              </a:rPr>
+              <a:t>pooling</a:t>
+            </a:r>
+            <a:r>
+              <a:rPr lang="de-DE" sz="1600" dirty="0">
+                <a:solidFill>
+                  <a:srgbClr val="1F2A44"/>
+                </a:solidFill>
+                <a:latin typeface="Georgia"/>
+              </a:rPr>
+              <a:t> </a:t>
+            </a:r>
+            <a:r>
+              <a:rPr lang="de-DE" sz="1600" dirty="0" err="1">
+                <a:solidFill>
+                  <a:srgbClr val="1F2A44"/>
+                </a:solidFill>
+                <a:latin typeface="Georgia"/>
+              </a:rPr>
+              <a:t>approach</a:t>
+            </a:r>
+            <a:endParaRPr lang="de-DE" altLang="de-DE" sz="1600" dirty="0">
+              <a:solidFill>
+                <a:srgbClr val="1F2A44"/>
+              </a:solidFill>
+              <a:latin typeface="Georgia"/>
+            </a:endParaRPr>
           </a:p>
         </p:txBody>
       </p:sp>
@@ -12344,8 +12662,8 @@
         </p:nvSpPr>
         <p:spPr bwMode="auto">
           <a:xfrm rot="10800000" flipV="1">
-            <a:off x="981307" y="1825608"/>
-            <a:ext cx="9471102" cy="3539430"/>
+            <a:off x="936702" y="1422678"/>
+            <a:ext cx="9471102" cy="5262979"/>
           </a:xfrm>
           <a:prstGeom prst="rect">
             <a:avLst/>
@@ -13611,6 +13929,448 @@
                 <a:latin typeface="Georgia"/>
               </a:rPr>
               <a:t>.</a:t>
+            </a:r>
+          </a:p>
+          <a:p>
+            <a:endParaRPr lang="de-DE" sz="1600" dirty="0">
+              <a:solidFill>
+                <a:srgbClr val="1F2A44"/>
+              </a:solidFill>
+              <a:latin typeface="Georgia"/>
+            </a:endParaRPr>
+          </a:p>
+          <a:p>
+            <a:r>
+              <a:rPr lang="de-DE" sz="1600" dirty="0" err="1">
+                <a:solidFill>
+                  <a:srgbClr val="1F2A44"/>
+                </a:solidFill>
+                <a:latin typeface="Georgia"/>
+              </a:rPr>
+              <a:t>Kaggle</a:t>
+            </a:r>
+            <a:r>
+              <a:rPr lang="de-DE" sz="1600" dirty="0">
+                <a:solidFill>
+                  <a:srgbClr val="1F2A44"/>
+                </a:solidFill>
+                <a:latin typeface="Georgia"/>
+              </a:rPr>
+              <a:t> Submission Progression (12 total </a:t>
+            </a:r>
+            <a:r>
+              <a:rPr lang="de-DE" sz="1600" dirty="0" err="1">
+                <a:solidFill>
+                  <a:srgbClr val="1F2A44"/>
+                </a:solidFill>
+                <a:latin typeface="Georgia"/>
+              </a:rPr>
+              <a:t>submissions</a:t>
+            </a:r>
+            <a:r>
+              <a:rPr lang="de-DE" sz="1600" dirty="0">
+                <a:solidFill>
+                  <a:srgbClr val="1F2A44"/>
+                </a:solidFill>
+                <a:latin typeface="Georgia"/>
+              </a:rPr>
+              <a:t>): v2-v4 (Feature Engineering): MAE 0.94 → 0.91 v5-v6 (Hyperparameter Tuning): MAE 0.88 → 0.86 v7-v9 (Ensemble </a:t>
+            </a:r>
+            <a:r>
+              <a:rPr lang="de-DE" sz="1600" dirty="0" err="1">
+                <a:solidFill>
+                  <a:srgbClr val="1F2A44"/>
+                </a:solidFill>
+                <a:latin typeface="Georgia"/>
+              </a:rPr>
+              <a:t>Strategies</a:t>
+            </a:r>
+            <a:r>
+              <a:rPr lang="de-DE" sz="1600" dirty="0">
+                <a:solidFill>
+                  <a:srgbClr val="1F2A44"/>
+                </a:solidFill>
+                <a:latin typeface="Georgia"/>
+              </a:rPr>
+              <a:t>): MAE 0.85 → 0.83 v10-v12 (</a:t>
+            </a:r>
+            <a:r>
+              <a:rPr lang="de-DE" sz="1600" dirty="0" err="1">
+                <a:solidFill>
+                  <a:srgbClr val="1F2A44"/>
+                </a:solidFill>
+                <a:latin typeface="Georgia"/>
+              </a:rPr>
+              <a:t>Advanced</a:t>
+            </a:r>
+            <a:r>
+              <a:rPr lang="de-DE" sz="1600" dirty="0">
+                <a:solidFill>
+                  <a:srgbClr val="1F2A44"/>
+                </a:solidFill>
+                <a:latin typeface="Georgia"/>
+              </a:rPr>
+              <a:t> Methods): MAE 0.81 → 0.80 Final Performance: - Best MAE </a:t>
+            </a:r>
+            <a:r>
+              <a:rPr lang="de-DE" sz="1600" dirty="0" err="1">
+                <a:solidFill>
+                  <a:srgbClr val="1F2A44"/>
+                </a:solidFill>
+                <a:latin typeface="Georgia"/>
+              </a:rPr>
+              <a:t>achieved</a:t>
+            </a:r>
+            <a:r>
+              <a:rPr lang="de-DE" sz="1600" dirty="0">
+                <a:solidFill>
+                  <a:srgbClr val="1F2A44"/>
+                </a:solidFill>
+                <a:latin typeface="Georgia"/>
+              </a:rPr>
+              <a:t>: 0.8124 - Target Baseline 3: 0.8056 - Status: Very </a:t>
+            </a:r>
+            <a:r>
+              <a:rPr lang="de-DE" sz="1600" dirty="0" err="1">
+                <a:solidFill>
+                  <a:srgbClr val="1F2A44"/>
+                </a:solidFill>
+                <a:latin typeface="Georgia"/>
+              </a:rPr>
+              <a:t>close</a:t>
+            </a:r>
+            <a:r>
+              <a:rPr lang="de-DE" sz="1600" dirty="0">
+                <a:solidFill>
+                  <a:srgbClr val="1F2A44"/>
+                </a:solidFill>
+                <a:latin typeface="Georgia"/>
+              </a:rPr>
+              <a:t> </a:t>
+            </a:r>
+            <a:r>
+              <a:rPr lang="de-DE" sz="1600" dirty="0" err="1">
+                <a:solidFill>
+                  <a:srgbClr val="1F2A44"/>
+                </a:solidFill>
+                <a:latin typeface="Georgia"/>
+              </a:rPr>
+              <a:t>to</a:t>
+            </a:r>
+            <a:r>
+              <a:rPr lang="de-DE" sz="1600" dirty="0">
+                <a:solidFill>
+                  <a:srgbClr val="1F2A44"/>
+                </a:solidFill>
+                <a:latin typeface="Georgia"/>
+              </a:rPr>
+              <a:t> strong </a:t>
+            </a:r>
+            <a:r>
+              <a:rPr lang="de-DE" sz="1600" dirty="0" err="1">
+                <a:solidFill>
+                  <a:srgbClr val="1F2A44"/>
+                </a:solidFill>
+                <a:latin typeface="Georgia"/>
+              </a:rPr>
+              <a:t>baseline</a:t>
+            </a:r>
+            <a:r>
+              <a:rPr lang="de-DE" sz="1600" dirty="0">
+                <a:solidFill>
+                  <a:srgbClr val="1F2A44"/>
+                </a:solidFill>
+                <a:latin typeface="Georgia"/>
+              </a:rPr>
+              <a:t> Key </a:t>
+            </a:r>
+            <a:r>
+              <a:rPr lang="de-DE" sz="1600" dirty="0" err="1">
+                <a:solidFill>
+                  <a:srgbClr val="1F2A44"/>
+                </a:solidFill>
+                <a:latin typeface="Georgia"/>
+              </a:rPr>
+              <a:t>Finding</a:t>
+            </a:r>
+            <a:r>
+              <a:rPr lang="de-DE" sz="1600" dirty="0">
+                <a:solidFill>
+                  <a:srgbClr val="1F2A44"/>
+                </a:solidFill>
+                <a:latin typeface="Georgia"/>
+              </a:rPr>
+              <a:t>: Feature </a:t>
+            </a:r>
+            <a:r>
+              <a:rPr lang="de-DE" sz="1600" dirty="0" err="1">
+                <a:solidFill>
+                  <a:srgbClr val="1F2A44"/>
+                </a:solidFill>
+                <a:latin typeface="Georgia"/>
+              </a:rPr>
+              <a:t>engineering</a:t>
+            </a:r>
+            <a:r>
+              <a:rPr lang="de-DE" sz="1600" dirty="0">
+                <a:solidFill>
+                  <a:srgbClr val="1F2A44"/>
+                </a:solidFill>
+                <a:latin typeface="Georgia"/>
+              </a:rPr>
+              <a:t> </a:t>
+            </a:r>
+            <a:r>
+              <a:rPr lang="de-DE" sz="1600" dirty="0" err="1">
+                <a:solidFill>
+                  <a:srgbClr val="1F2A44"/>
+                </a:solidFill>
+                <a:latin typeface="Georgia"/>
+              </a:rPr>
+              <a:t>is</a:t>
+            </a:r>
+            <a:r>
+              <a:rPr lang="de-DE" sz="1600" dirty="0">
+                <a:solidFill>
+                  <a:srgbClr val="1F2A44"/>
+                </a:solidFill>
+                <a:latin typeface="Georgia"/>
+              </a:rPr>
+              <a:t> </a:t>
+            </a:r>
+            <a:r>
+              <a:rPr lang="de-DE" sz="1600" dirty="0" err="1">
+                <a:solidFill>
+                  <a:srgbClr val="1F2A44"/>
+                </a:solidFill>
+                <a:latin typeface="Georgia"/>
+              </a:rPr>
+              <a:t>the</a:t>
+            </a:r>
+            <a:r>
+              <a:rPr lang="de-DE" sz="1600" dirty="0">
+                <a:solidFill>
+                  <a:srgbClr val="1F2A44"/>
+                </a:solidFill>
+                <a:latin typeface="Georgia"/>
+              </a:rPr>
+              <a:t> dominant </a:t>
+            </a:r>
+            <a:r>
+              <a:rPr lang="de-DE" sz="1600" dirty="0" err="1">
+                <a:solidFill>
+                  <a:srgbClr val="1F2A44"/>
+                </a:solidFill>
+                <a:latin typeface="Georgia"/>
+              </a:rPr>
+              <a:t>driver</a:t>
+            </a:r>
+            <a:r>
+              <a:rPr lang="de-DE" sz="1600" dirty="0">
+                <a:solidFill>
+                  <a:srgbClr val="1F2A44"/>
+                </a:solidFill>
+                <a:latin typeface="Georgia"/>
+              </a:rPr>
+              <a:t> </a:t>
+            </a:r>
+            <a:r>
+              <a:rPr lang="de-DE" sz="1600" dirty="0" err="1">
+                <a:solidFill>
+                  <a:srgbClr val="1F2A44"/>
+                </a:solidFill>
+                <a:latin typeface="Georgia"/>
+              </a:rPr>
+              <a:t>of</a:t>
+            </a:r>
+            <a:r>
+              <a:rPr lang="de-DE" sz="1600" dirty="0">
+                <a:solidFill>
+                  <a:srgbClr val="1F2A44"/>
+                </a:solidFill>
+                <a:latin typeface="Georgia"/>
+              </a:rPr>
+              <a:t> </a:t>
+            </a:r>
+            <a:r>
+              <a:rPr lang="de-DE" sz="1600" dirty="0" err="1">
+                <a:solidFill>
+                  <a:srgbClr val="1F2A44"/>
+                </a:solidFill>
+                <a:latin typeface="Georgia"/>
+              </a:rPr>
+              <a:t>improvement</a:t>
+            </a:r>
+            <a:r>
+              <a:rPr lang="de-DE" sz="1600" dirty="0">
+                <a:solidFill>
+                  <a:srgbClr val="1F2A44"/>
+                </a:solidFill>
+                <a:latin typeface="Georgia"/>
+              </a:rPr>
+              <a:t> (27.8%), </a:t>
+            </a:r>
+            <a:r>
+              <a:rPr lang="de-DE" sz="1600" dirty="0" err="1">
+                <a:solidFill>
+                  <a:srgbClr val="1F2A44"/>
+                </a:solidFill>
+                <a:latin typeface="Georgia"/>
+              </a:rPr>
+              <a:t>far</a:t>
+            </a:r>
+            <a:r>
+              <a:rPr lang="de-DE" sz="1600" dirty="0">
+                <a:solidFill>
+                  <a:srgbClr val="1F2A44"/>
+                </a:solidFill>
+                <a:latin typeface="Georgia"/>
+              </a:rPr>
+              <a:t> </a:t>
+            </a:r>
+            <a:r>
+              <a:rPr lang="de-DE" sz="1600" dirty="0" err="1">
+                <a:solidFill>
+                  <a:srgbClr val="1F2A44"/>
+                </a:solidFill>
+                <a:latin typeface="Georgia"/>
+              </a:rPr>
+              <a:t>exceeding</a:t>
+            </a:r>
+            <a:r>
+              <a:rPr lang="de-DE" sz="1600" dirty="0">
+                <a:solidFill>
+                  <a:srgbClr val="1F2A44"/>
+                </a:solidFill>
+                <a:latin typeface="Georgia"/>
+              </a:rPr>
+              <a:t> </a:t>
+            </a:r>
+            <a:r>
+              <a:rPr lang="de-DE" sz="1600" dirty="0" err="1">
+                <a:solidFill>
+                  <a:srgbClr val="1F2A44"/>
+                </a:solidFill>
+                <a:latin typeface="Georgia"/>
+              </a:rPr>
+              <a:t>gains</a:t>
+            </a:r>
+            <a:r>
+              <a:rPr lang="de-DE" sz="1600" dirty="0">
+                <a:solidFill>
+                  <a:srgbClr val="1F2A44"/>
+                </a:solidFill>
+                <a:latin typeface="Georgia"/>
+              </a:rPr>
+              <a:t> </a:t>
+            </a:r>
+            <a:r>
+              <a:rPr lang="de-DE" sz="1600" dirty="0" err="1">
+                <a:solidFill>
+                  <a:srgbClr val="1F2A44"/>
+                </a:solidFill>
+                <a:latin typeface="Georgia"/>
+              </a:rPr>
+              <a:t>from</a:t>
+            </a:r>
+            <a:r>
+              <a:rPr lang="de-DE" sz="1600" dirty="0">
+                <a:solidFill>
+                  <a:srgbClr val="1F2A44"/>
+                </a:solidFill>
+                <a:latin typeface="Georgia"/>
+              </a:rPr>
+              <a:t> </a:t>
+            </a:r>
+            <a:r>
+              <a:rPr lang="de-DE" sz="1600" dirty="0" err="1">
+                <a:solidFill>
+                  <a:srgbClr val="1F2A44"/>
+                </a:solidFill>
+                <a:latin typeface="Georgia"/>
+              </a:rPr>
+              <a:t>hyperparameter</a:t>
+            </a:r>
+            <a:r>
+              <a:rPr lang="de-DE" sz="1600" dirty="0">
+                <a:solidFill>
+                  <a:srgbClr val="1F2A44"/>
+                </a:solidFill>
+                <a:latin typeface="Georgia"/>
+              </a:rPr>
+              <a:t> </a:t>
+            </a:r>
+            <a:r>
+              <a:rPr lang="de-DE" sz="1600" dirty="0" err="1">
+                <a:solidFill>
+                  <a:srgbClr val="1F2A44"/>
+                </a:solidFill>
+                <a:latin typeface="Georgia"/>
+              </a:rPr>
+              <a:t>tuning</a:t>
+            </a:r>
+            <a:r>
+              <a:rPr lang="de-DE" sz="1600" dirty="0">
+                <a:solidFill>
+                  <a:srgbClr val="1F2A44"/>
+                </a:solidFill>
+                <a:latin typeface="Georgia"/>
+              </a:rPr>
+              <a:t> (2.5%) </a:t>
+            </a:r>
+            <a:r>
+              <a:rPr lang="de-DE" sz="1600" dirty="0" err="1">
+                <a:solidFill>
+                  <a:srgbClr val="1F2A44"/>
+                </a:solidFill>
+                <a:latin typeface="Georgia"/>
+              </a:rPr>
+              <a:t>or</a:t>
+            </a:r>
+            <a:r>
+              <a:rPr lang="de-DE" sz="1600" dirty="0">
+                <a:solidFill>
+                  <a:srgbClr val="1F2A44"/>
+                </a:solidFill>
+                <a:latin typeface="Georgia"/>
+              </a:rPr>
+              <a:t> </a:t>
+            </a:r>
+            <a:r>
+              <a:rPr lang="de-DE" sz="1600" dirty="0" err="1">
+                <a:solidFill>
+                  <a:srgbClr val="1F2A44"/>
+                </a:solidFill>
+                <a:latin typeface="Georgia"/>
+              </a:rPr>
+              <a:t>ensemble</a:t>
+            </a:r>
+            <a:r>
+              <a:rPr lang="de-DE" sz="1600" dirty="0">
+                <a:solidFill>
+                  <a:srgbClr val="1F2A44"/>
+                </a:solidFill>
+                <a:latin typeface="Georgia"/>
+              </a:rPr>
+              <a:t> </a:t>
+            </a:r>
+            <a:r>
+              <a:rPr lang="de-DE" sz="1600" dirty="0" err="1">
+                <a:solidFill>
+                  <a:srgbClr val="1F2A44"/>
+                </a:solidFill>
+                <a:latin typeface="Georgia"/>
+              </a:rPr>
+              <a:t>methods</a:t>
+            </a:r>
+            <a:r>
+              <a:rPr lang="de-DE" sz="1600" dirty="0">
+                <a:solidFill>
+                  <a:srgbClr val="1F2A44"/>
+                </a:solidFill>
+                <a:latin typeface="Georgia"/>
+              </a:rPr>
+              <a:t> (2.4%)</a:t>
             </a:r>
           </a:p>
         </p:txBody>
